--- a/tools/bcard/Presentation.pptx
+++ b/tools/bcard/Presentation.pptx
@@ -6323,6 +6323,13 @@
   <p:clrMapOvr>
     <a:masterClrMapping/>
   </p:clrMapOvr>
+  <p:timing>
+    <p:tnLst>
+      <p:par>
+        <p:cTn id="1" dur="indefinite" restart="never" nodeType="tmRoot"/>
+      </p:par>
+    </p:tnLst>
+  </p:timing>
 </p:sld>
 </file>
 
@@ -7046,6 +7053,13 @@
   <p:clrMapOvr>
     <a:masterClrMapping/>
   </p:clrMapOvr>
+  <p:timing>
+    <p:tnLst>
+      <p:par>
+        <p:cTn id="1" dur="indefinite" restart="never" nodeType="tmRoot"/>
+      </p:par>
+    </p:tnLst>
+  </p:timing>
 </p:sld>
 </file>
 
@@ -7474,6 +7488,13 @@
   <p:clrMapOvr>
     <a:masterClrMapping/>
   </p:clrMapOvr>
+  <p:timing>
+    <p:tnLst>
+      <p:par>
+        <p:cTn id="1" dur="indefinite" restart="never" nodeType="tmRoot"/>
+      </p:par>
+    </p:tnLst>
+  </p:timing>
 </p:sld>
 </file>
 
@@ -8042,6 +8063,13 @@
   <p:clrMapOvr>
     <a:masterClrMapping/>
   </p:clrMapOvr>
+  <p:timing>
+    <p:tnLst>
+      <p:par>
+        <p:cTn id="1" dur="indefinite" restart="never" nodeType="tmRoot"/>
+      </p:par>
+    </p:tnLst>
+  </p:timing>
 </p:sld>
 </file>
 
@@ -8533,6 +8561,13 @@
   <p:clrMapOvr>
     <a:masterClrMapping/>
   </p:clrMapOvr>
+  <p:timing>
+    <p:tnLst>
+      <p:par>
+        <p:cTn id="1" dur="indefinite" restart="never" nodeType="tmRoot"/>
+      </p:par>
+    </p:tnLst>
+  </p:timing>
 </p:sld>
 </file>
 
@@ -8876,6 +8911,13 @@
   <p:clrMapOvr>
     <a:masterClrMapping/>
   </p:clrMapOvr>
+  <p:timing>
+    <p:tnLst>
+      <p:par>
+        <p:cTn id="1" dur="indefinite" restart="never" nodeType="tmRoot"/>
+      </p:par>
+    </p:tnLst>
+  </p:timing>
 </p:sld>
 </file>
 
@@ -9216,30 +9258,20 @@
           </a:bodyPr>
           <a:lstStyle/>
           <a:p>
+            <a:pPr marL="0" indent="0">
+              <a:buNone/>
+            </a:pPr>
             <a:r>
               <a:rPr lang="en-US" dirty="0">
-                <a:latin typeface="Aptos"/>
                 <a:ea typeface="+mn-lt"/>
                 <a:cs typeface="Arial"/>
+                <a:hlinkClick r:id="rId2"/>
               </a:rPr>
-              <a:t>Informal testing</a:t>
-            </a:r>
-          </a:p>
-          <a:p>
-            <a:r>
-              <a:rPr lang="en-US" dirty="0">
-                <a:cs typeface="Arial"/>
-              </a:rPr>
-              <a:t>Accessibility</a:t>
-            </a:r>
-          </a:p>
-          <a:p>
-            <a:r>
-              <a:rPr lang="en-US" dirty="0">
-                <a:cs typeface="Arial"/>
-              </a:rPr>
-              <a:t>Mobile responsiveness</a:t>
-            </a:r>
+              <a:t>https://harveypw0503.github.io/Software_Engineering_Project_Submission/tools/bcard/bcard.html</a:t>
+            </a:r>
+            <a:endParaRPr lang="en-US" dirty="0">
+              <a:cs typeface="Arial"/>
+            </a:endParaRPr>
           </a:p>
         </p:txBody>
       </p:sp>
@@ -9258,7 +9290,7 @@
           <p:nvPr/>
         </p:nvPicPr>
         <p:blipFill>
-          <a:blip r:embed="rId2"/>
+          <a:blip r:embed="rId3"/>
           <a:stretch>
             <a:fillRect/>
           </a:stretch>
@@ -9283,6 +9315,13 @@
   <p:clrMapOvr>
     <a:masterClrMapping/>
   </p:clrMapOvr>
+  <p:timing>
+    <p:tnLst>
+      <p:par>
+        <p:cTn id="1" dur="indefinite" restart="never" nodeType="tmRoot"/>
+      </p:par>
+    </p:tnLst>
+  </p:timing>
 </p:sld>
 </file>
 
@@ -9734,6 +9773,13 @@
   <p:clrMapOvr>
     <a:masterClrMapping/>
   </p:clrMapOvr>
+  <p:timing>
+    <p:tnLst>
+      <p:par>
+        <p:cTn id="1" dur="indefinite" restart="never" nodeType="tmRoot"/>
+      </p:par>
+    </p:tnLst>
+  </p:timing>
 </p:sld>
 </file>
 

--- a/tools/bcard/Presentation.pptx
+++ b/tools/bcard/Presentation.pptx
@@ -8513,6 +8513,22 @@
               </a:rPr>
               <a:t>css</a:t>
             </a:r>
+            <a:r>
+              <a:rPr lang="en-US" sz="2000" dirty="0" smtClean="0">
+                <a:latin typeface="Aptos"/>
+                <a:ea typeface="+mn-lt"/>
+                <a:cs typeface="Arial"/>
+              </a:rPr>
+              <a:t> and </a:t>
+            </a:r>
+            <a:r>
+              <a:rPr lang="en-US" sz="2000" smtClean="0">
+                <a:latin typeface="Aptos"/>
+                <a:ea typeface="+mn-lt"/>
+                <a:cs typeface="Arial"/>
+              </a:rPr>
+              <a:t>js</a:t>
+            </a:r>
             <a:endParaRPr lang="en-US" sz="2000" dirty="0" smtClean="0">
               <a:latin typeface="Aptos"/>
               <a:ea typeface="+mn-lt"/>

--- a/tools/bcard/Presentation.pptx
+++ b/tools/bcard/Presentation.pptx
@@ -8522,7 +8522,7 @@
               <a:t> and </a:t>
             </a:r>
             <a:r>
-              <a:rPr lang="en-US" sz="2000" smtClean="0">
+              <a:rPr lang="en-US" sz="2000" dirty="0" err="1" smtClean="0">
                 <a:latin typeface="Aptos"/>
                 <a:ea typeface="+mn-lt"/>
                 <a:cs typeface="Arial"/>
@@ -9246,51 +9246,6 @@
           </a:p>
         </p:txBody>
       </p:sp>
-      <p:sp>
-        <p:nvSpPr>
-          <p:cNvPr id="71" name="Content Placeholder 2">
-            <a:extLst>
-              <a:ext uri="{FF2B5EF4-FFF2-40B4-BE49-F238E27FC236}">
-                <a16:creationId xmlns:a16="http://schemas.microsoft.com/office/drawing/2014/main" id="{A6F50495-865B-F353-8BC1-7C2FF0F66E2B}"/>
-              </a:ext>
-            </a:extLst>
-          </p:cNvPr>
-          <p:cNvSpPr>
-            <a:spLocks noGrp="1"/>
-          </p:cNvSpPr>
-          <p:nvPr>
-            <p:ph idx="1"/>
-          </p:nvPr>
-        </p:nvSpPr>
-        <p:spPr>
-          <a:xfrm>
-            <a:off x="5370153" y="1526033"/>
-            <a:ext cx="5536397" cy="3935281"/>
-          </a:xfrm>
-        </p:spPr>
-        <p:txBody>
-          <a:bodyPr>
-            <a:normAutofit/>
-          </a:bodyPr>
-          <a:lstStyle/>
-          <a:p>
-            <a:pPr marL="0" indent="0">
-              <a:buNone/>
-            </a:pPr>
-            <a:r>
-              <a:rPr lang="en-US" dirty="0">
-                <a:ea typeface="+mn-lt"/>
-                <a:cs typeface="Arial"/>
-                <a:hlinkClick r:id="rId2"/>
-              </a:rPr>
-              <a:t>https://harveypw0503.github.io/Software_Engineering_Project_Submission/tools/bcard/bcard.html</a:t>
-            </a:r>
-            <a:endParaRPr lang="en-US" dirty="0">
-              <a:cs typeface="Arial"/>
-            </a:endParaRPr>
-          </a:p>
-        </p:txBody>
-      </p:sp>
       <p:pic>
         <p:nvPicPr>
           <p:cNvPr id="7" name="Picture 6" descr="A white object with a shadow&#10;&#10;AI-generated content may be incorrect.">
@@ -9306,7 +9261,7 @@
           <p:nvPr/>
         </p:nvPicPr>
         <p:blipFill>
-          <a:blip r:embed="rId3"/>
+          <a:blip r:embed="rId2"/>
           <a:stretch>
             <a:fillRect/>
           </a:stretch>
